--- a/docs/CASALS-20261013.pptx
+++ b/docs/CASALS-20261013.pptx
@@ -11,8 +11,8 @@
     <p:sldId id="256" r:id="rId2"/>
     <p:sldId id="583" r:id="rId3"/>
     <p:sldId id="584" r:id="rId4"/>
-    <p:sldId id="597" r:id="rId5"/>
-    <p:sldId id="599" r:id="rId6"/>
+    <p:sldId id="599" r:id="rId5"/>
+    <p:sldId id="597" r:id="rId6"/>
     <p:sldId id="600" r:id="rId7"/>
     <p:sldId id="601" r:id="rId8"/>
   </p:sldIdLst>
@@ -121,8 +121,8 @@
             <p14:sldId id="256"/>
             <p14:sldId id="583"/>
             <p14:sldId id="584"/>
+            <p14:sldId id="599"/>
             <p14:sldId id="597"/>
-            <p14:sldId id="599"/>
             <p14:sldId id="600"/>
             <p14:sldId id="601"/>
           </p14:sldIdLst>
@@ -152,7 +152,7 @@
   <pc:docChgLst>
     <pc:chgData name="Jiageng Zhong" userId="b52c9415-1ab4-4841-99d2-946641921277" providerId="ADAL" clId="{8EC3C21B-848A-4780-93CD-51C3A3128A88}"/>
     <pc:docChg chg="undo custSel addSld delSld modSld sldOrd modSection">
-      <pc:chgData name="Jiageng Zhong" userId="b52c9415-1ab4-4841-99d2-946641921277" providerId="ADAL" clId="{8EC3C21B-848A-4780-93CD-51C3A3128A88}" dt="2026-10-10T02:29:49.858" v="2363" actId="1076"/>
+      <pc:chgData name="Jiageng Zhong" userId="b52c9415-1ab4-4841-99d2-946641921277" providerId="ADAL" clId="{8EC3C21B-848A-4780-93CD-51C3A3128A88}" dt="2026-10-10T18:15:24.091" v="2477" actId="14100"/>
       <pc:docMkLst>
         <pc:docMk/>
       </pc:docMkLst>
@@ -412,14 +412,14 @@
           <pc:sldMk cId="714234123" sldId="595"/>
         </pc:sldMkLst>
       </pc:sldChg>
-      <pc:sldChg chg="addSp delSp modSp mod">
-        <pc:chgData name="Jiageng Zhong" userId="b52c9415-1ab4-4841-99d2-946641921277" providerId="ADAL" clId="{8EC3C21B-848A-4780-93CD-51C3A3128A88}" dt="2026-10-10T02:21:46.832" v="2298" actId="21"/>
+      <pc:sldChg chg="addSp delSp modSp mod ord">
+        <pc:chgData name="Jiageng Zhong" userId="b52c9415-1ab4-4841-99d2-946641921277" providerId="ADAL" clId="{8EC3C21B-848A-4780-93CD-51C3A3128A88}" dt="2026-10-10T18:15:24.091" v="2477" actId="14100"/>
         <pc:sldMkLst>
           <pc:docMk/>
           <pc:sldMk cId="696280670" sldId="599"/>
         </pc:sldMkLst>
         <pc:spChg chg="mod">
-          <ac:chgData name="Jiageng Zhong" userId="b52c9415-1ab4-4841-99d2-946641921277" providerId="ADAL" clId="{8EC3C21B-848A-4780-93CD-51C3A3128A88}" dt="2026-10-10T02:21:16.468" v="2293" actId="208"/>
+          <ac:chgData name="Jiageng Zhong" userId="b52c9415-1ab4-4841-99d2-946641921277" providerId="ADAL" clId="{8EC3C21B-848A-4780-93CD-51C3A3128A88}" dt="2026-10-10T18:14:32.691" v="2406" actId="1036"/>
           <ac:spMkLst>
             <pc:docMk/>
             <pc:sldMk cId="696280670" sldId="599"/>
@@ -448,6 +448,22 @@
             <pc:docMk/>
             <pc:sldMk cId="696280670" sldId="599"/>
             <ac:picMk id="8" creationId="{B21B3969-BC10-0F2E-D51A-70D1C0A1DF41}"/>
+          </ac:picMkLst>
+        </pc:picChg>
+        <pc:picChg chg="add mod ord modCrop">
+          <ac:chgData name="Jiageng Zhong" userId="b52c9415-1ab4-4841-99d2-946641921277" providerId="ADAL" clId="{8EC3C21B-848A-4780-93CD-51C3A3128A88}" dt="2026-10-10T18:15:18.073" v="2475" actId="1035"/>
+          <ac:picMkLst>
+            <pc:docMk/>
+            <pc:sldMk cId="696280670" sldId="599"/>
+            <ac:picMk id="10" creationId="{B34A11F4-6407-6753-D9C9-0E995D4AAEB7}"/>
+          </ac:picMkLst>
+        </pc:picChg>
+        <pc:picChg chg="add mod ord modCrop">
+          <ac:chgData name="Jiageng Zhong" userId="b52c9415-1ab4-4841-99d2-946641921277" providerId="ADAL" clId="{8EC3C21B-848A-4780-93CD-51C3A3128A88}" dt="2026-10-10T18:15:24.091" v="2477" actId="14100"/>
+          <ac:picMkLst>
+            <pc:docMk/>
+            <pc:sldMk cId="696280670" sldId="599"/>
+            <ac:picMk id="12" creationId="{8B0EDE88-4DC1-8C82-0BB0-E7D9735DC0C0}"/>
           </ac:picMkLst>
         </pc:picChg>
       </pc:sldChg>
@@ -3106,6 +3122,155 @@
 </file>
 
 <file path=ppt/slides/slide4.xml><?xml version="1.0" encoding="utf-8"?>
+<p:sld xmlns:a="http://schemas.openxmlformats.org/drawingml/2006/main" xmlns:r="http://schemas.openxmlformats.org/officeDocument/2006/relationships" xmlns:p="http://schemas.openxmlformats.org/presentationml/2006/main">
+  <p:cSld>
+    <p:spTree>
+      <p:nvGrpSpPr>
+        <p:cNvPr id="1" name="">
+          <a:extLst>
+            <a:ext uri="{FF2B5EF4-FFF2-40B4-BE49-F238E27FC236}">
+              <a16:creationId xmlns:a16="http://schemas.microsoft.com/office/drawing/2014/main" id="{113E97FA-CDFB-9F85-8BCC-B3A68D7A11E4}"/>
+            </a:ext>
+          </a:extLst>
+        </p:cNvPr>
+        <p:cNvGrpSpPr/>
+        <p:nvPr/>
+      </p:nvGrpSpPr>
+      <p:grpSpPr>
+        <a:xfrm>
+          <a:off x="0" y="0"/>
+          <a:ext cx="0" cy="0"/>
+          <a:chOff x="0" y="0"/>
+          <a:chExt cx="0" cy="0"/>
+        </a:xfrm>
+      </p:grpSpPr>
+      <p:pic>
+        <p:nvPicPr>
+          <p:cNvPr id="10" name="Picture 9">
+            <a:extLst>
+              <a:ext uri="{FF2B5EF4-FFF2-40B4-BE49-F238E27FC236}">
+                <a16:creationId xmlns:a16="http://schemas.microsoft.com/office/drawing/2014/main" id="{B34A11F4-6407-6753-D9C9-0E995D4AAEB7}"/>
+              </a:ext>
+            </a:extLst>
+          </p:cNvPr>
+          <p:cNvPicPr>
+            <a:picLocks noChangeAspect="1"/>
+          </p:cNvPicPr>
+          <p:nvPr/>
+        </p:nvPicPr>
+        <p:blipFill>
+          <a:blip r:embed="rId2"/>
+          <a:srcRect b="13422"/>
+          <a:stretch>
+            <a:fillRect/>
+          </a:stretch>
+        </p:blipFill>
+        <p:spPr>
+          <a:xfrm>
+            <a:off x="0" y="3405010"/>
+            <a:ext cx="12192000" cy="3166671"/>
+          </a:xfrm>
+          <a:prstGeom prst="rect">
+            <a:avLst/>
+          </a:prstGeom>
+        </p:spPr>
+      </p:pic>
+      <p:pic>
+        <p:nvPicPr>
+          <p:cNvPr id="12" name="Picture 11">
+            <a:extLst>
+              <a:ext uri="{FF2B5EF4-FFF2-40B4-BE49-F238E27FC236}">
+                <a16:creationId xmlns:a16="http://schemas.microsoft.com/office/drawing/2014/main" id="{8B0EDE88-4DC1-8C82-0BB0-E7D9735DC0C0}"/>
+              </a:ext>
+            </a:extLst>
+          </p:cNvPr>
+          <p:cNvPicPr>
+            <a:picLocks noChangeAspect="1"/>
+          </p:cNvPicPr>
+          <p:nvPr/>
+        </p:nvPicPr>
+        <p:blipFill>
+          <a:blip r:embed="rId3"/>
+          <a:srcRect l="-67" t="12379" r="74051" b="19935"/>
+          <a:stretch>
+            <a:fillRect/>
+          </a:stretch>
+        </p:blipFill>
+        <p:spPr>
+          <a:xfrm>
+            <a:off x="1193216" y="310366"/>
+            <a:ext cx="3370554" cy="3166671"/>
+          </a:xfrm>
+          <a:prstGeom prst="rect">
+            <a:avLst/>
+          </a:prstGeom>
+        </p:spPr>
+      </p:pic>
+      <p:sp>
+        <p:nvSpPr>
+          <p:cNvPr id="2" name="TextBox 1">
+            <a:extLst>
+              <a:ext uri="{FF2B5EF4-FFF2-40B4-BE49-F238E27FC236}">
+                <a16:creationId xmlns:a16="http://schemas.microsoft.com/office/drawing/2014/main" id="{2AE4E296-B6AE-14EC-EF19-91C21075E06A}"/>
+              </a:ext>
+            </a:extLst>
+          </p:cNvPr>
+          <p:cNvSpPr txBox="1"/>
+          <p:nvPr/>
+        </p:nvSpPr>
+        <p:spPr>
+          <a:xfrm>
+            <a:off x="227066" y="150700"/>
+            <a:ext cx="1505540" cy="461665"/>
+          </a:xfrm>
+          <a:prstGeom prst="rect">
+            <a:avLst/>
+          </a:prstGeom>
+          <a:noFill/>
+          <a:ln>
+            <a:solidFill>
+              <a:schemeClr val="bg1"/>
+            </a:solidFill>
+          </a:ln>
+        </p:spPr>
+        <p:txBody>
+          <a:bodyPr wrap="none" rtlCol="0">
+            <a:spAutoFit/>
+          </a:bodyPr>
+          <a:lstStyle/>
+          <a:p>
+            <a:pPr marL="342900" indent="-342900">
+              <a:buFont typeface="Wingdings" panose="05000000000000000000" pitchFamily="2" charset="2"/>
+              <a:buChar char="Ø"/>
+            </a:pPr>
+            <a:r>
+              <a:rPr lang="en-US" altLang="zh-CN" sz="2400" b="1" dirty="0">
+                <a:latin typeface="Arial" panose="020B0604020202020204" pitchFamily="34" charset="0"/>
+                <a:cs typeface="Arial" panose="020B0604020202020204" pitchFamily="34" charset="0"/>
+              </a:rPr>
+              <a:t>Sweep</a:t>
+            </a:r>
+            <a:endParaRPr lang="en-US" sz="2400" b="1" dirty="0">
+              <a:latin typeface="Arial" panose="020B0604020202020204" pitchFamily="34" charset="0"/>
+              <a:cs typeface="Arial" panose="020B0604020202020204" pitchFamily="34" charset="0"/>
+            </a:endParaRPr>
+          </a:p>
+        </p:txBody>
+      </p:sp>
+    </p:spTree>
+    <p:extLst>
+      <p:ext uri="{BB962C8B-B14F-4D97-AF65-F5344CB8AC3E}">
+        <p14:creationId xmlns:p14="http://schemas.microsoft.com/office/powerpoint/2010/main" val="696280670"/>
+      </p:ext>
+    </p:extLst>
+  </p:cSld>
+  <p:clrMapOvr>
+    <a:masterClrMapping/>
+  </p:clrMapOvr>
+</p:sld>
+</file>
+
+<file path=ppt/slides/slide5.xml><?xml version="1.0" encoding="utf-8"?>
 <p:sld xmlns:a="http://schemas.openxmlformats.org/drawingml/2006/main" xmlns:r="http://schemas.openxmlformats.org/officeDocument/2006/relationships" xmlns:p="http://schemas.openxmlformats.org/presentationml/2006/main">
   <p:cSld>
     <p:spTree>
@@ -4579,93 +4744,6 @@
 </p:sld>
 </file>
 
-<file path=ppt/slides/slide5.xml><?xml version="1.0" encoding="utf-8"?>
-<p:sld xmlns:a="http://schemas.openxmlformats.org/drawingml/2006/main" xmlns:r="http://schemas.openxmlformats.org/officeDocument/2006/relationships" xmlns:p="http://schemas.openxmlformats.org/presentationml/2006/main">
-  <p:cSld>
-    <p:spTree>
-      <p:nvGrpSpPr>
-        <p:cNvPr id="1" name="">
-          <a:extLst>
-            <a:ext uri="{FF2B5EF4-FFF2-40B4-BE49-F238E27FC236}">
-              <a16:creationId xmlns:a16="http://schemas.microsoft.com/office/drawing/2014/main" id="{113E97FA-CDFB-9F85-8BCC-B3A68D7A11E4}"/>
-            </a:ext>
-          </a:extLst>
-        </p:cNvPr>
-        <p:cNvGrpSpPr/>
-        <p:nvPr/>
-      </p:nvGrpSpPr>
-      <p:grpSpPr>
-        <a:xfrm>
-          <a:off x="0" y="0"/>
-          <a:ext cx="0" cy="0"/>
-          <a:chOff x="0" y="0"/>
-          <a:chExt cx="0" cy="0"/>
-        </a:xfrm>
-      </p:grpSpPr>
-      <p:sp>
-        <p:nvSpPr>
-          <p:cNvPr id="2" name="TextBox 1">
-            <a:extLst>
-              <a:ext uri="{FF2B5EF4-FFF2-40B4-BE49-F238E27FC236}">
-                <a16:creationId xmlns:a16="http://schemas.microsoft.com/office/drawing/2014/main" id="{2AE4E296-B6AE-14EC-EF19-91C21075E06A}"/>
-              </a:ext>
-            </a:extLst>
-          </p:cNvPr>
-          <p:cNvSpPr txBox="1"/>
-          <p:nvPr/>
-        </p:nvSpPr>
-        <p:spPr>
-          <a:xfrm>
-            <a:off x="227066" y="141706"/>
-            <a:ext cx="2517036" cy="461665"/>
-          </a:xfrm>
-          <a:prstGeom prst="rect">
-            <a:avLst/>
-          </a:prstGeom>
-          <a:noFill/>
-          <a:ln>
-            <a:solidFill>
-              <a:schemeClr val="bg1"/>
-            </a:solidFill>
-          </a:ln>
-        </p:spPr>
-        <p:txBody>
-          <a:bodyPr wrap="none" rtlCol="0">
-            <a:spAutoFit/>
-          </a:bodyPr>
-          <a:lstStyle/>
-          <a:p>
-            <a:pPr marL="342900" indent="-342900">
-              <a:buFont typeface="Wingdings" panose="05000000000000000000" pitchFamily="2" charset="2"/>
-              <a:buChar char="Ø"/>
-            </a:pPr>
-            <a:r>
-              <a:rPr lang="en-US" altLang="zh-CN" sz="2400" b="1" dirty="0" err="1">
-                <a:latin typeface="Arial" panose="020B0604020202020204" pitchFamily="34" charset="0"/>
-                <a:cs typeface="Arial" panose="020B0604020202020204" pitchFamily="34" charset="0"/>
-              </a:rPr>
-              <a:t>Georeference</a:t>
-            </a:r>
-            <a:endParaRPr lang="en-US" sz="2400" b="1" dirty="0">
-              <a:latin typeface="Arial" panose="020B0604020202020204" pitchFamily="34" charset="0"/>
-              <a:cs typeface="Arial" panose="020B0604020202020204" pitchFamily="34" charset="0"/>
-            </a:endParaRPr>
-          </a:p>
-        </p:txBody>
-      </p:sp>
-    </p:spTree>
-    <p:extLst>
-      <p:ext uri="{BB962C8B-B14F-4D97-AF65-F5344CB8AC3E}">
-        <p14:creationId xmlns:p14="http://schemas.microsoft.com/office/powerpoint/2010/main" val="696280670"/>
-      </p:ext>
-    </p:extLst>
-  </p:cSld>
-  <p:clrMapOvr>
-    <a:masterClrMapping/>
-  </p:clrMapOvr>
-</p:sld>
-</file>
-
 <file path=ppt/slides/slide6.xml><?xml version="1.0" encoding="utf-8"?>
 <p:sld xmlns:a="http://schemas.openxmlformats.org/drawingml/2006/main" xmlns:r="http://schemas.openxmlformats.org/officeDocument/2006/relationships" xmlns:p="http://schemas.openxmlformats.org/presentationml/2006/main">
   <p:cSld>
